--- a/RF_Insurance_Final_v3.pptx
+++ b/RF_Insurance_Final_v3.pptx
@@ -3011,8 +3011,8 @@
         </p:blipFill>
         <p:spPr>
           <a:xfrm>
-            <a:off x="1371600" y="1078992"/>
-            <a:ext cx="6400800" cy="3794760"/>
+            <a:off x="1527652" y="1028887"/>
+            <a:ext cx="5482747" cy="3250486"/>
           </a:xfrm>
           <a:prstGeom prst="rect">
             <a:avLst/>
@@ -3027,7 +3027,7 @@
         </p:nvSpPr>
         <p:spPr>
           <a:xfrm>
-            <a:off x="365760" y="4206240"/>
+            <a:off x="324571" y="4379235"/>
             <a:ext cx="8412480" cy="713232"/>
           </a:xfrm>
           <a:prstGeom prst="rect">
@@ -3047,7 +3047,7 @@
           <a:bodyPr/>
           <a:lstStyle/>
           <a:p>
-            <a:endParaRPr lang="en-US"/>
+            <a:endParaRPr lang="en-US" dirty="0"/>
           </a:p>
         </p:txBody>
       </p:sp>
@@ -3059,7 +3059,7 @@
         </p:nvSpPr>
         <p:spPr>
           <a:xfrm>
-            <a:off x="411480" y="4279392"/>
+            <a:off x="370291" y="4452387"/>
             <a:ext cx="64008" cy="566928"/>
           </a:xfrm>
           <a:prstGeom prst="rect">
@@ -3091,7 +3091,7 @@
         </p:nvSpPr>
         <p:spPr>
           <a:xfrm>
-            <a:off x="594360" y="4279392"/>
+            <a:off x="553171" y="4452387"/>
             <a:ext cx="8092440" cy="594360"/>
           </a:xfrm>
           <a:prstGeom prst="rect">
@@ -3242,8 +3242,8 @@
         </p:blipFill>
         <p:spPr>
           <a:xfrm>
-            <a:off x="1371600" y="1078992"/>
-            <a:ext cx="6400800" cy="3794760"/>
+            <a:off x="1326271" y="971410"/>
+            <a:ext cx="5733555" cy="3399179"/>
           </a:xfrm>
           <a:prstGeom prst="rect">
             <a:avLst/>
@@ -3258,7 +3258,7 @@
         </p:nvSpPr>
         <p:spPr>
           <a:xfrm>
-            <a:off x="365760" y="4206240"/>
+            <a:off x="365760" y="4416309"/>
             <a:ext cx="8412480" cy="713232"/>
           </a:xfrm>
           <a:prstGeom prst="rect">
@@ -3290,7 +3290,7 @@
         </p:nvSpPr>
         <p:spPr>
           <a:xfrm>
-            <a:off x="411480" y="4279392"/>
+            <a:off x="411480" y="4489461"/>
             <a:ext cx="64008" cy="566928"/>
           </a:xfrm>
           <a:prstGeom prst="rect">
@@ -3322,7 +3322,7 @@
         </p:nvSpPr>
         <p:spPr>
           <a:xfrm>
-            <a:off x="594360" y="4279392"/>
+            <a:off x="594360" y="4489461"/>
             <a:ext cx="8092440" cy="594360"/>
           </a:xfrm>
           <a:prstGeom prst="rect">
@@ -3474,7 +3474,7 @@
         <p:spPr>
           <a:xfrm>
             <a:off x="1371600" y="1078992"/>
-            <a:ext cx="6400800" cy="3200400"/>
+            <a:ext cx="6096000" cy="3048000"/>
           </a:xfrm>
           <a:prstGeom prst="rect">
             <a:avLst/>
@@ -3814,8 +3814,8 @@
         </p:blipFill>
         <p:spPr>
           <a:xfrm>
-            <a:off x="1371600" y="1078992"/>
-            <a:ext cx="6400800" cy="3794760"/>
+            <a:off x="1606379" y="1063110"/>
+            <a:ext cx="5531707" cy="3279512"/>
           </a:xfrm>
           <a:prstGeom prst="rect">
             <a:avLst/>
@@ -3830,7 +3830,7 @@
         </p:nvSpPr>
         <p:spPr>
           <a:xfrm>
-            <a:off x="365760" y="4206240"/>
+            <a:off x="365760" y="4416309"/>
             <a:ext cx="8412480" cy="713232"/>
           </a:xfrm>
           <a:prstGeom prst="rect">
@@ -3862,7 +3862,7 @@
         </p:nvSpPr>
         <p:spPr>
           <a:xfrm>
-            <a:off x="411480" y="4279392"/>
+            <a:off x="411480" y="4489461"/>
             <a:ext cx="64008" cy="566928"/>
           </a:xfrm>
           <a:prstGeom prst="rect">
@@ -3894,7 +3894,7 @@
         </p:nvSpPr>
         <p:spPr>
           <a:xfrm>
-            <a:off x="594360" y="4279392"/>
+            <a:off x="594360" y="4489461"/>
             <a:ext cx="8092440" cy="594360"/>
           </a:xfrm>
           <a:prstGeom prst="rect">
@@ -6649,7 +6649,7 @@
               <a:buNone/>
             </a:pPr>
             <a:r>
-              <a:rPr lang="en-US" sz="1000" dirty="0">
+              <a:rPr lang="en-US" sz="700" dirty="0">
                 <a:solidFill>
                   <a:srgbClr val="C792EA"/>
                 </a:solidFill>
@@ -6660,7 +6660,7 @@
               <a:t>from</a:t>
             </a:r>
             <a:r>
-              <a:rPr lang="en-US" sz="1000" dirty="0">
+              <a:rPr lang="en-US" sz="700" dirty="0">
                 <a:solidFill>
                   <a:srgbClr val="EEFFFF"/>
                 </a:solidFill>
@@ -6671,7 +6671,7 @@
               <a:t> sklearn.ensemble </a:t>
             </a:r>
             <a:r>
-              <a:rPr lang="en-US" sz="1000" dirty="0">
+              <a:rPr lang="en-US" sz="700" dirty="0">
                 <a:solidFill>
                   <a:srgbClr val="C792EA"/>
                 </a:solidFill>
@@ -6682,7 +6682,7 @@
               <a:t>import</a:t>
             </a:r>
             <a:r>
-              <a:rPr lang="en-US" sz="1000" dirty="0">
+              <a:rPr lang="en-US" sz="700" dirty="0">
                 <a:solidFill>
                   <a:srgbClr val="EEFFFF"/>
                 </a:solidFill>
@@ -6693,14 +6693,14 @@
               <a:t> RandomForestRegressor
 </a:t>
             </a:r>
-            <a:endParaRPr lang="en-US" sz="1000" dirty="0"/>
+            <a:endParaRPr lang="en-US" sz="700" dirty="0"/>
           </a:p>
           <a:p>
             <a:pPr marL="0" indent="0">
               <a:buNone/>
             </a:pPr>
             <a:r>
-              <a:rPr lang="en-US" sz="1000" dirty="0">
+              <a:rPr lang="en-US" sz="700" dirty="0">
                 <a:solidFill>
                   <a:srgbClr val="C792EA"/>
                 </a:solidFill>
@@ -6711,7 +6711,7 @@
               <a:t>from</a:t>
             </a:r>
             <a:r>
-              <a:rPr lang="en-US" sz="1000" dirty="0">
+              <a:rPr lang="en-US" sz="700" dirty="0">
                 <a:solidFill>
                   <a:srgbClr val="EEFFFF"/>
                 </a:solidFill>
@@ -6722,7 +6722,7 @@
               <a:t> sklearn.model_selection </a:t>
             </a:r>
             <a:r>
-              <a:rPr lang="en-US" sz="1000" dirty="0">
+              <a:rPr lang="en-US" sz="700" dirty="0">
                 <a:solidFill>
                   <a:srgbClr val="C792EA"/>
                 </a:solidFill>
@@ -6733,7 +6733,7 @@
               <a:t>import</a:t>
             </a:r>
             <a:r>
-              <a:rPr lang="en-US" sz="1000" dirty="0">
+              <a:rPr lang="en-US" sz="700" dirty="0">
                 <a:solidFill>
                   <a:srgbClr val="EEFFFF"/>
                 </a:solidFill>
@@ -6744,14 +6744,14 @@
               <a:t> train_test_split
 </a:t>
             </a:r>
-            <a:endParaRPr lang="en-US" sz="1000" dirty="0"/>
+            <a:endParaRPr lang="en-US" sz="700" dirty="0"/>
           </a:p>
           <a:p>
             <a:pPr marL="0" indent="0">
               <a:buNone/>
             </a:pPr>
             <a:r>
-              <a:rPr lang="en-US" sz="1000" dirty="0">
+              <a:rPr lang="en-US" sz="700" dirty="0">
                 <a:solidFill>
                   <a:srgbClr val="C792EA"/>
                 </a:solidFill>
@@ -6762,7 +6762,7 @@
               <a:t>from</a:t>
             </a:r>
             <a:r>
-              <a:rPr lang="en-US" sz="1000" dirty="0">
+              <a:rPr lang="en-US" sz="700" dirty="0">
                 <a:solidFill>
                   <a:srgbClr val="EEFFFF"/>
                 </a:solidFill>
@@ -6773,7 +6773,7 @@
               <a:t> sklearn.metrics </a:t>
             </a:r>
             <a:r>
-              <a:rPr lang="en-US" sz="1000" dirty="0">
+              <a:rPr lang="en-US" sz="700" dirty="0">
                 <a:solidFill>
                   <a:srgbClr val="C792EA"/>
                 </a:solidFill>
@@ -6784,7 +6784,7 @@
               <a:t>import</a:t>
             </a:r>
             <a:r>
-              <a:rPr lang="en-US" sz="1000" dirty="0">
+              <a:rPr lang="en-US" sz="700" dirty="0">
                 <a:solidFill>
                   <a:srgbClr val="EEFFFF"/>
                 </a:solidFill>
@@ -6795,14 +6795,14 @@
               <a:t> (
 </a:t>
             </a:r>
-            <a:endParaRPr lang="en-US" sz="1000" dirty="0"/>
+            <a:endParaRPr lang="en-US" sz="700" dirty="0"/>
           </a:p>
           <a:p>
             <a:pPr marL="0" indent="0">
               <a:buNone/>
             </a:pPr>
             <a:r>
-              <a:rPr lang="en-US" sz="1000" dirty="0">
+              <a:rPr lang="en-US" sz="700" dirty="0">
                 <a:solidFill>
                   <a:srgbClr val="EEFFFF"/>
                 </a:solidFill>
@@ -6813,14 +6813,14 @@
               <a:t>    mean_absolute_error, mean_squared_error, r2_score)
 </a:t>
             </a:r>
-            <a:endParaRPr lang="en-US" sz="1000" dirty="0"/>
+            <a:endParaRPr lang="en-US" sz="700" dirty="0"/>
           </a:p>
           <a:p>
             <a:pPr marL="0" indent="0">
               <a:buNone/>
             </a:pPr>
             <a:r>
-              <a:rPr lang="en-US" sz="1000" dirty="0">
+              <a:rPr lang="en-US" sz="700" dirty="0">
                 <a:solidFill>
                   <a:srgbClr val="EEFFFF"/>
                 </a:solidFill>
@@ -6831,14 +6831,14 @@
               <a:t>
 </a:t>
             </a:r>
-            <a:endParaRPr lang="en-US" sz="1000" dirty="0"/>
+            <a:endParaRPr lang="en-US" sz="700" dirty="0"/>
           </a:p>
           <a:p>
             <a:pPr marL="0" indent="0">
               <a:buNone/>
             </a:pPr>
             <a:r>
-              <a:rPr lang="en-US" sz="1000" dirty="0">
+              <a:rPr lang="en-US" sz="700" dirty="0">
                 <a:solidFill>
                   <a:srgbClr val="EEFFFF"/>
                 </a:solidFill>
@@ -6849,14 +6849,14 @@
               <a:t>X_train, X_test, y_train, y_test =
 </a:t>
             </a:r>
-            <a:endParaRPr lang="en-US" sz="1000" dirty="0"/>
+            <a:endParaRPr lang="en-US" sz="700" dirty="0"/>
           </a:p>
           <a:p>
             <a:pPr marL="0" indent="0">
               <a:buNone/>
             </a:pPr>
             <a:r>
-              <a:rPr lang="en-US" sz="1000" dirty="0">
+              <a:rPr lang="en-US" sz="700" dirty="0">
                 <a:solidFill>
                   <a:srgbClr val="EEFFFF"/>
                 </a:solidFill>
@@ -6867,7 +6867,7 @@
               <a:t>    train_test_split(X, y, test_size=</a:t>
             </a:r>
             <a:r>
-              <a:rPr lang="en-US" sz="1000" dirty="0">
+              <a:rPr lang="en-US" sz="700" dirty="0">
                 <a:solidFill>
                   <a:srgbClr val="F78C6C"/>
                 </a:solidFill>
@@ -6878,7 +6878,7 @@
               <a:t>0.2</a:t>
             </a:r>
             <a:r>
-              <a:rPr lang="en-US" sz="1000" dirty="0">
+              <a:rPr lang="en-US" sz="700" dirty="0">
                 <a:solidFill>
                   <a:srgbClr val="EEFFFF"/>
                 </a:solidFill>
@@ -6889,14 +6889,14 @@
               <a:t>,
 </a:t>
             </a:r>
-            <a:endParaRPr lang="en-US" sz="1000" dirty="0"/>
+            <a:endParaRPr lang="en-US" sz="700" dirty="0"/>
           </a:p>
           <a:p>
             <a:pPr marL="0" indent="0">
               <a:buNone/>
             </a:pPr>
             <a:r>
-              <a:rPr lang="en-US" sz="1000" dirty="0">
+              <a:rPr lang="en-US" sz="700" dirty="0">
                 <a:solidFill>
                   <a:srgbClr val="EEFFFF"/>
                 </a:solidFill>
@@ -6907,7 +6907,7 @@
               <a:t>    random_state=</a:t>
             </a:r>
             <a:r>
-              <a:rPr lang="en-US" sz="1000" dirty="0">
+              <a:rPr lang="en-US" sz="700" dirty="0">
                 <a:solidFill>
                   <a:srgbClr val="F78C6C"/>
                 </a:solidFill>
@@ -6918,7 +6918,7 @@
               <a:t>42</a:t>
             </a:r>
             <a:r>
-              <a:rPr lang="en-US" sz="1000" dirty="0">
+              <a:rPr lang="en-US" sz="700" dirty="0">
                 <a:solidFill>
                   <a:srgbClr val="EEFFFF"/>
                 </a:solidFill>
@@ -6929,14 +6929,14 @@
               <a:t>)
 </a:t>
             </a:r>
-            <a:endParaRPr lang="en-US" sz="1000" dirty="0"/>
+            <a:endParaRPr lang="en-US" sz="700" dirty="0"/>
           </a:p>
           <a:p>
             <a:pPr marL="0" indent="0">
               <a:buNone/>
             </a:pPr>
             <a:r>
-              <a:rPr lang="en-US" sz="1000" dirty="0">
+              <a:rPr lang="en-US" sz="700" dirty="0">
                 <a:solidFill>
                   <a:srgbClr val="EEFFFF"/>
                 </a:solidFill>
@@ -6947,14 +6947,14 @@
               <a:t>
 </a:t>
             </a:r>
-            <a:endParaRPr lang="en-US" sz="1000" dirty="0"/>
+            <a:endParaRPr lang="en-US" sz="700" dirty="0"/>
           </a:p>
           <a:p>
             <a:pPr marL="0" indent="0">
               <a:buNone/>
             </a:pPr>
             <a:r>
-              <a:rPr lang="en-US" sz="1000" dirty="0">
+              <a:rPr lang="en-US" sz="700" dirty="0">
                 <a:solidFill>
                   <a:srgbClr val="82AAFF"/>
                 </a:solidFill>
@@ -6965,14 +6965,14 @@
               <a:t>rf_model = RandomForestRegressor(
 </a:t>
             </a:r>
-            <a:endParaRPr lang="en-US" sz="1000" dirty="0"/>
+            <a:endParaRPr lang="en-US" sz="700" dirty="0"/>
           </a:p>
           <a:p>
             <a:pPr marL="0" indent="0">
               <a:buNone/>
             </a:pPr>
             <a:r>
-              <a:rPr lang="en-US" sz="1000" dirty="0">
+              <a:rPr lang="en-US" sz="700" dirty="0">
                 <a:solidFill>
                   <a:srgbClr val="EEFFFF"/>
                 </a:solidFill>
@@ -6983,7 +6983,7 @@
               <a:t>    n_estimators=</a:t>
             </a:r>
             <a:r>
-              <a:rPr lang="en-US" sz="1000" dirty="0">
+              <a:rPr lang="en-US" sz="700" dirty="0">
                 <a:solidFill>
                   <a:srgbClr val="F78C6C"/>
                 </a:solidFill>
@@ -6994,7 +6994,7 @@
               <a:t>200</a:t>
             </a:r>
             <a:r>
-              <a:rPr lang="en-US" sz="1000" dirty="0">
+              <a:rPr lang="en-US" sz="700" dirty="0">
                 <a:solidFill>
                   <a:srgbClr val="EEFFFF"/>
                 </a:solidFill>
@@ -7005,14 +7005,14 @@
               <a:t>,
 </a:t>
             </a:r>
-            <a:endParaRPr lang="en-US" sz="1000" dirty="0"/>
+            <a:endParaRPr lang="en-US" sz="700" dirty="0"/>
           </a:p>
           <a:p>
             <a:pPr marL="0" indent="0">
               <a:buNone/>
             </a:pPr>
             <a:r>
-              <a:rPr lang="en-US" sz="1000" dirty="0">
+              <a:rPr lang="en-US" sz="700" dirty="0">
                 <a:solidFill>
                   <a:srgbClr val="EEFFFF"/>
                 </a:solidFill>
@@ -7023,7 +7023,7 @@
               <a:t>    random_state=</a:t>
             </a:r>
             <a:r>
-              <a:rPr lang="en-US" sz="1000" dirty="0">
+              <a:rPr lang="en-US" sz="700" dirty="0">
                 <a:solidFill>
                   <a:srgbClr val="F78C6C"/>
                 </a:solidFill>
@@ -7034,14 +7034,14 @@
               <a:t>42
 </a:t>
             </a:r>
-            <a:endParaRPr lang="en-US" sz="1000" dirty="0"/>
+            <a:endParaRPr lang="en-US" sz="700" dirty="0"/>
           </a:p>
           <a:p>
             <a:pPr marL="0" indent="0">
               <a:buNone/>
             </a:pPr>
             <a:r>
-              <a:rPr lang="en-US" sz="1000" dirty="0">
+              <a:rPr lang="en-US" sz="700" dirty="0">
                 <a:solidFill>
                   <a:srgbClr val="EEFFFF"/>
                 </a:solidFill>
@@ -7052,14 +7052,14 @@
               <a:t>)
 </a:t>
             </a:r>
-            <a:endParaRPr lang="en-US" sz="1000" dirty="0"/>
+            <a:endParaRPr lang="en-US" sz="700" dirty="0"/>
           </a:p>
           <a:p>
             <a:pPr marL="0" indent="0">
               <a:buNone/>
             </a:pPr>
             <a:r>
-              <a:rPr lang="en-US" sz="1000" dirty="0">
+              <a:rPr lang="en-US" sz="700" dirty="0">
                 <a:solidFill>
                   <a:srgbClr val="82AAFF"/>
                 </a:solidFill>
@@ -7070,14 +7070,14 @@
               <a:t>rf_model.fit(X_train, y_train)
 </a:t>
             </a:r>
-            <a:endParaRPr lang="en-US" sz="1000" dirty="0"/>
+            <a:endParaRPr lang="en-US" sz="700" dirty="0"/>
           </a:p>
           <a:p>
             <a:pPr marL="0" indent="0">
               <a:buNone/>
             </a:pPr>
             <a:r>
-              <a:rPr lang="en-US" sz="1000" dirty="0">
+              <a:rPr lang="en-US" sz="700" dirty="0">
                 <a:solidFill>
                   <a:srgbClr val="82AAFF"/>
                 </a:solidFill>
@@ -7087,7 +7087,7 @@
               </a:rPr>
               <a:t>y_pred_rf = rf_model.predict(X_test)</a:t>
             </a:r>
-            <a:endParaRPr lang="en-US" sz="1000" dirty="0"/>
+            <a:endParaRPr lang="en-US" sz="700" dirty="0"/>
           </a:p>
         </p:txBody>
       </p:sp>
@@ -8295,7 +8295,7 @@
         </p:nvSpPr>
         <p:spPr>
           <a:xfrm>
-            <a:off x="411480" y="4828032"/>
+            <a:off x="411480" y="4901184"/>
             <a:ext cx="8321040" cy="182880"/>
           </a:xfrm>
           <a:prstGeom prst="rect">
@@ -9191,7 +9191,7 @@
         <p:spPr>
           <a:xfrm>
             <a:off x="5742432" y="4352544"/>
-            <a:ext cx="2926080" cy="457200"/>
+            <a:ext cx="2990088" cy="375975"/>
           </a:xfrm>
           <a:prstGeom prst="rect">
             <a:avLst/>

--- a/RF_Insurance_Final_v3.pptx
+++ b/RF_Insurance_Final_v3.pptx
@@ -9706,7 +9706,7 @@
                 <a:ea typeface="Calibri" pitchFamily="34" charset="-122"/>
                 <a:cs typeface="Calibri" pitchFamily="34" charset="-120"/>
               </a:rPr>
-              <a:t>A linear regression model on this same dataset achieves only R²≈0.75 vs Random Forest's 0.884. The gap confirms that smoker × BMI interactions are non-linear and can only be captured by an ensemble tree method.</a:t>
+              <a:t>A linear regression model on this same dataset achieves only R²≈0.80 vs Random Forest's 0.884. The gap confirms that smoker × BMI interactions are non-linear and can only be captured by an ensemble tree method.</a:t>
             </a:r>
             <a:endParaRPr lang="en-US" sz="1100" dirty="0"/>
           </a:p>
